--- a/Project/Linguistic_Interpretability.pptx
+++ b/Project/Linguistic_Interpretability.pptx
@@ -3506,7 +3506,7 @@
                 <a:ea typeface="Calibri" pitchFamily="34" charset="-122"/>
                 <a:cs typeface="Calibri" pitchFamily="34" charset="-120"/>
               </a:rPr>
-              <a:t>Page 9 / 15</a:t>
+              <a:t>Page 10 / 19</a:t>
             </a:r>
             <a:endParaRPr lang="en-US" sz="1100" dirty="0"/>
           </a:p>
@@ -4494,7 +4494,7 @@
                 <a:ea typeface="Calibri" pitchFamily="34" charset="-122"/>
                 <a:cs typeface="Calibri" pitchFamily="34" charset="-120"/>
               </a:rPr>
-              <a:t>Page 10 / 15</a:t>
+              <a:t>Page 11 / 19</a:t>
             </a:r>
             <a:endParaRPr lang="en-US" sz="1100" dirty="0"/>
           </a:p>
@@ -5415,7 +5415,7 @@
                 <a:ea typeface="Calibri" pitchFamily="34" charset="-122"/>
                 <a:cs typeface="Calibri" pitchFamily="34" charset="-120"/>
               </a:rPr>
-              <a:t>Page 11 / 15</a:t>
+              <a:t>Page 12 / 19</a:t>
             </a:r>
             <a:endParaRPr lang="en-US" sz="1100" dirty="0"/>
           </a:p>
@@ -6325,7 +6325,7 @@
                 <a:ea typeface="Calibri" pitchFamily="34" charset="-122"/>
                 <a:cs typeface="Calibri" pitchFamily="34" charset="-120"/>
               </a:rPr>
-              <a:t>Page 12 / 15</a:t>
+              <a:t>Page 13 / 19</a:t>
             </a:r>
             <a:endParaRPr lang="en-US" sz="1100" dirty="0"/>
           </a:p>
@@ -7058,9 +7058,6 @@
           <a:bodyPr wrap="square" rtlCol="0" anchor="ctr"/>
           <a:lstStyle/>
           <a:p>
-            <a:pPr marL="0" indent="0">
-              <a:buNone/>
-            </a:pPr>
             <a:r>
               <a:rPr lang="en-US" sz="1100" dirty="0">
                 <a:solidFill>
@@ -7070,7 +7067,7 @@
                 <a:ea typeface="Calibri" pitchFamily="34" charset="-122"/>
                 <a:cs typeface="Calibri" pitchFamily="34" charset="-120"/>
               </a:rPr>
-              <a:t>صفحه 13 / 15</a:t>
+              <a:t>Page 14 / 19</a:t>
             </a:r>
             <a:endParaRPr lang="en-US" sz="1100" dirty="0"/>
           </a:p>
@@ -7519,9 +7516,6 @@
           <a:bodyPr wrap="square" rtlCol="0" anchor="ctr"/>
           <a:lstStyle/>
           <a:p>
-            <a:pPr marL="0" indent="0">
-              <a:buNone/>
-            </a:pPr>
             <a:r>
               <a:rPr lang="en-US" sz="1100" dirty="0">
                 <a:solidFill>
@@ -7531,7 +7525,7 @@
                 <a:ea typeface="Calibri" pitchFamily="34" charset="-122"/>
                 <a:cs typeface="Calibri" pitchFamily="34" charset="-120"/>
               </a:rPr>
-              <a:t>صفحه 13 / 15</a:t>
+              <a:t>Page 15 / 19</a:t>
             </a:r>
             <a:endParaRPr lang="en-US" sz="1100" dirty="0"/>
           </a:p>
@@ -8053,9 +8047,6 @@
           <a:bodyPr wrap="square" rtlCol="0" anchor="ctr"/>
           <a:lstStyle/>
           <a:p>
-            <a:pPr marL="0" indent="0">
-              <a:buNone/>
-            </a:pPr>
             <a:r>
               <a:rPr lang="en-US" sz="1100" dirty="0">
                 <a:solidFill>
@@ -8065,7 +8056,7 @@
                 <a:ea typeface="Calibri" pitchFamily="34" charset="-122"/>
                 <a:cs typeface="Calibri" pitchFamily="34" charset="-120"/>
               </a:rPr>
-              <a:t>صفحه 14 / 15</a:t>
+              <a:t>Page 16 / 19</a:t>
             </a:r>
             <a:endParaRPr lang="en-US" sz="1100" dirty="0"/>
           </a:p>
@@ -8969,9 +8960,6 @@
           <a:bodyPr wrap="square" rtlCol="0" anchor="ctr"/>
           <a:lstStyle/>
           <a:p>
-            <a:pPr marL="0" indent="0">
-              <a:buNone/>
-            </a:pPr>
             <a:r>
               <a:rPr lang="en-US" sz="1100" dirty="0">
                 <a:solidFill>
@@ -8981,7 +8969,7 @@
                 <a:ea typeface="Calibri" pitchFamily="34" charset="-122"/>
                 <a:cs typeface="Calibri" pitchFamily="34" charset="-120"/>
               </a:rPr>
-              <a:t>صفحه 15 / 15</a:t>
+              <a:t>Page 17 / 19</a:t>
             </a:r>
             <a:endParaRPr lang="en-US" sz="1100" dirty="0"/>
           </a:p>
@@ -9563,9 +9551,6 @@
           <a:bodyPr wrap="square" rtlCol="0" anchor="ctr"/>
           <a:lstStyle/>
           <a:p>
-            <a:pPr marL="0" indent="0">
-              <a:buNone/>
-            </a:pPr>
             <a:r>
               <a:rPr lang="en-US" sz="1100" dirty="0">
                 <a:solidFill>
@@ -9575,7 +9560,7 @@
                 <a:ea typeface="Calibri" pitchFamily="34" charset="-122"/>
                 <a:cs typeface="Calibri" pitchFamily="34" charset="-120"/>
               </a:rPr>
-              <a:t>صفحه 15 / 15</a:t>
+              <a:t>Page 18 / 19</a:t>
             </a:r>
             <a:endParaRPr lang="en-US" sz="1100" dirty="0"/>
           </a:p>
@@ -10482,7 +10467,7 @@
                 <a:ea typeface="Calibri" pitchFamily="34" charset="-122"/>
                 <a:cs typeface="Calibri" pitchFamily="34" charset="-120"/>
               </a:rPr>
-              <a:t>Page 2 / 15</a:t>
+              <a:t>Page 3 / 19</a:t>
             </a:r>
             <a:endParaRPr lang="en-US" sz="1100" dirty="0"/>
           </a:p>
@@ -11213,7 +11198,7 @@
                 <a:ea typeface="Calibri" pitchFamily="34" charset="-122"/>
                 <a:cs typeface="Calibri" pitchFamily="34" charset="-120"/>
               </a:rPr>
-              <a:t>Page 3 / 15</a:t>
+              <a:t>Page 4 / 19</a:t>
             </a:r>
             <a:endParaRPr lang="en-US" sz="1100" dirty="0"/>
           </a:p>
@@ -11965,7 +11950,7 @@
                 <a:ea typeface="Calibri" pitchFamily="34" charset="-122"/>
                 <a:cs typeface="Calibri" pitchFamily="34" charset="-120"/>
               </a:rPr>
-              <a:t>Page 4 / 15</a:t>
+              <a:t>Page 5 / 19</a:t>
             </a:r>
             <a:endParaRPr lang="en-US" sz="1100" dirty="0"/>
           </a:p>
@@ -13058,7 +13043,7 @@
           <a:lstStyle/>
           <a:p>
             <a:r>
-              <a:rPr lang="en-US" sz="1100">
+              <a:rPr lang="en-US" sz="1100" dirty="0">
                 <a:solidFill>
                   <a:srgbClr val="6B7280"/>
                 </a:solidFill>
@@ -13066,7 +13051,7 @@
                 <a:ea typeface="Calibri" pitchFamily="34" charset="-122"/>
                 <a:cs typeface="Calibri" pitchFamily="34" charset="-120"/>
               </a:rPr>
-              <a:t>Page 5 / 15</a:t>
+              <a:t>Page 6 / 19</a:t>
             </a:r>
             <a:endParaRPr lang="en-US" sz="1100" dirty="0"/>
           </a:p>
@@ -13631,7 +13616,7 @@
           <a:lstStyle/>
           <a:p>
             <a:r>
-              <a:rPr lang="en-US" sz="1100">
+              <a:rPr lang="en-US" sz="1100" dirty="0">
                 <a:solidFill>
                   <a:srgbClr val="6B7280"/>
                 </a:solidFill>
@@ -13639,7 +13624,7 @@
                 <a:ea typeface="Calibri" pitchFamily="34" charset="-122"/>
                 <a:cs typeface="Calibri" pitchFamily="34" charset="-120"/>
               </a:rPr>
-              <a:t>Page 6 / 15</a:t>
+              <a:t>Page 7 / 19</a:t>
             </a:r>
             <a:endParaRPr lang="en-US" sz="1100" dirty="0"/>
           </a:p>
@@ -14146,7 +14131,7 @@
                 <a:ea typeface="Calibri" pitchFamily="34" charset="-122"/>
                 <a:cs typeface="Calibri" pitchFamily="34" charset="-120"/>
               </a:rPr>
-              <a:t>Page 7 / 15</a:t>
+              <a:t>Page 8 / 19</a:t>
             </a:r>
             <a:endParaRPr lang="en-US" sz="1100" dirty="0"/>
           </a:p>
@@ -15068,7 +15053,7 @@
                 <a:ea typeface="Calibri" pitchFamily="34" charset="-122"/>
                 <a:cs typeface="Calibri" pitchFamily="34" charset="-120"/>
               </a:rPr>
-              <a:t>Page 8 / 15</a:t>
+              <a:t>Page 9 / 19</a:t>
             </a:r>
             <a:endParaRPr lang="en-US" sz="1100" dirty="0"/>
           </a:p>

--- a/Project/Linguistic_Interpretability.pptx
+++ b/Project/Linguistic_Interpretability.pptx
@@ -12765,14 +12765,14 @@
       </p:sp>
       <p:sp>
         <p:nvSpPr>
-          <p:cNvPr id="24" name="Text 22"/>
-          <p:cNvSpPr/>
-          <p:nvPr/>
-        </p:nvSpPr>
-        <p:spPr>
-          <a:xfrm>
-            <a:off x="7086600" y="4434840"/>
-            <a:ext cx="4419295" cy="274320"/>
+          <p:cNvPr id="25" name="Text 23"/>
+          <p:cNvSpPr/>
+          <p:nvPr/>
+        </p:nvSpPr>
+        <p:spPr>
+          <a:xfrm>
+            <a:off x="7056425" y="4344031"/>
+            <a:ext cx="4419295" cy="942340"/>
           </a:xfrm>
           <a:prstGeom prst="rect">
             <a:avLst/>
@@ -12781,14 +12781,15 @@
           <a:ln/>
         </p:spPr>
         <p:txBody>
-          <a:bodyPr wrap="square" rtlCol="0" anchor="ctr"/>
-          <a:lstStyle/>
-          <a:p>
-            <a:pPr marL="0" indent="0" algn="l">
-              <a:buNone/>
-            </a:pPr>
-            <a:r>
-              <a:rPr lang="en-US" sz="1500" b="1" dirty="0">
+          <a:bodyPr wrap="square" rtlCol="0" anchor="t"/>
+          <a:lstStyle/>
+          <a:p>
+            <a:pPr marL="165100" indent="-165100" algn="l">
+              <a:buSzPct val="100000"/>
+              <a:buChar char="•"/>
+            </a:pPr>
+            <a:r>
+              <a:rPr lang="en-US" sz="1300" dirty="0">
                 <a:solidFill>
                   <a:srgbClr val="FFFFFF"/>
                 </a:solidFill>
@@ -12796,48 +12797,22 @@
                 <a:ea typeface="Calibri" pitchFamily="34" charset="-122"/>
                 <a:cs typeface="Calibri" pitchFamily="34" charset="-120"/>
               </a:rPr>
-              <a:t>Why this matters for your project?</a:t>
-            </a:r>
-            <a:endParaRPr lang="en-US" sz="1500" dirty="0"/>
-          </a:p>
-        </p:txBody>
-      </p:sp>
-      <p:sp>
-        <p:nvSpPr>
-          <p:cNvPr id="25" name="Text 23"/>
-          <p:cNvSpPr/>
-          <p:nvPr/>
-        </p:nvSpPr>
-        <p:spPr>
-          <a:xfrm>
-            <a:off x="7086600" y="4736592"/>
-            <a:ext cx="4419295" cy="942340"/>
-          </a:xfrm>
-          <a:prstGeom prst="rect">
-            <a:avLst/>
-          </a:prstGeom>
-          <a:noFill/>
-          <a:ln/>
-        </p:spPr>
-        <p:txBody>
-          <a:bodyPr wrap="square" rtlCol="0" anchor="t"/>
-          <a:lstStyle/>
+              <a:t>Survey → "What can be put into practice?“</a:t>
+            </a:r>
+          </a:p>
           <a:p>
             <a:pPr marL="165100" indent="-165100" algn="l">
               <a:buSzPct val="100000"/>
               <a:buChar char="•"/>
             </a:pPr>
-            <a:r>
-              <a:rPr lang="en-US" sz="1300" dirty="0">
-                <a:solidFill>
-                  <a:srgbClr val="FFFFFF"/>
-                </a:solidFill>
-                <a:latin typeface="Calibri" pitchFamily="34" charset="0"/>
-                <a:ea typeface="Calibri" pitchFamily="34" charset="-122"/>
-                <a:cs typeface="Calibri" pitchFamily="34" charset="-120"/>
-              </a:rPr>
-              <a:t>Survey → "What can be put into practice?“</a:t>
-            </a:r>
+            <a:endParaRPr lang="en-US" sz="1300" dirty="0">
+              <a:solidFill>
+                <a:srgbClr val="FFFFFF"/>
+              </a:solidFill>
+              <a:latin typeface="Calibri" pitchFamily="34" charset="0"/>
+              <a:ea typeface="Calibri" pitchFamily="34" charset="-122"/>
+              <a:cs typeface="Calibri" pitchFamily="34" charset="-120"/>
+            </a:endParaRPr>
           </a:p>
           <a:p>
             <a:pPr marL="165100" indent="-165100" algn="l">
